--- a/Phân tích thiết kế/Phân tích thiết kế hệ thống.pptx
+++ b/Phân tích thiết kế/Phân tích thiết kế hệ thống.pptx
@@ -234,7 +234,7 @@
           <a:p>
             <a:fld id="{48B45424-6BAC-416C-8F6C-5F9DE854A36B}" type="datetimeFigureOut">
               <a:rPr lang="en-US" smtClean="0"/>
-              <a:t>3/9/2026</a:t>
+              <a:t>3/16/2026</a:t>
             </a:fld>
             <a:endParaRPr lang="en-US"/>
           </a:p>
@@ -412,7 +412,7 @@
           <a:p>
             <a:fld id="{6B733702-C25A-40B9-9167-54BAA79B29B0}" type="datetimeFigureOut">
               <a:rPr lang="en-US" smtClean="0"/>
-              <a:t>3/9/2026</a:t>
+              <a:t>3/16/2026</a:t>
             </a:fld>
             <a:endParaRPr lang="en-US"/>
           </a:p>
@@ -798,7 +798,7 @@
             <a:fld id="{F70EAA40-3A53-4A3D-924A-D38F1059C7D5}" type="datetime1">
               <a:rPr lang="en-US" smtClean="0"/>
               <a:pPr/>
-              <a:t>3/9/2026</a:t>
+              <a:t>3/16/2026</a:t>
             </a:fld>
             <a:endParaRPr lang="en-US"/>
           </a:p>
@@ -1132,7 +1132,7 @@
             <a:fld id="{F70EAA40-3A53-4A3D-924A-D38F1059C7D5}" type="datetime1">
               <a:rPr lang="en-US" smtClean="0"/>
               <a:pPr/>
-              <a:t>3/9/2026</a:t>
+              <a:t>3/16/2026</a:t>
             </a:fld>
             <a:endParaRPr lang="en-US"/>
           </a:p>
@@ -1818,7 +1818,7 @@
             <a:fld id="{F70EAA40-3A53-4A3D-924A-D38F1059C7D5}" type="datetime1">
               <a:rPr lang="en-US" smtClean="0"/>
               <a:pPr/>
-              <a:t>3/9/2026</a:t>
+              <a:t>3/16/2026</a:t>
             </a:fld>
             <a:endParaRPr lang="en-US"/>
           </a:p>
@@ -2008,7 +2008,7 @@
             <a:fld id="{F70EAA40-3A53-4A3D-924A-D38F1059C7D5}" type="datetime1">
               <a:rPr lang="en-US" smtClean="0"/>
               <a:pPr/>
-              <a:t>3/9/2026</a:t>
+              <a:t>3/16/2026</a:t>
             </a:fld>
             <a:endParaRPr lang="en-US"/>
           </a:p>
@@ -2591,7 +2591,7 @@
             <a:fld id="{F70EAA40-3A53-4A3D-924A-D38F1059C7D5}" type="datetime1">
               <a:rPr lang="en-US" smtClean="0"/>
               <a:pPr/>
-              <a:t>3/9/2026</a:t>
+              <a:t>3/16/2026</a:t>
             </a:fld>
             <a:endParaRPr lang="en-US"/>
           </a:p>
@@ -2777,7 +2777,7 @@
             <a:fld id="{F70EAA40-3A53-4A3D-924A-D38F1059C7D5}" type="datetime1">
               <a:rPr lang="en-US" smtClean="0"/>
               <a:pPr/>
-              <a:t>3/9/2026</a:t>
+              <a:t>3/16/2026</a:t>
             </a:fld>
             <a:endParaRPr lang="en-US"/>
           </a:p>
@@ -3113,7 +3113,7 @@
             <a:fld id="{F70EAA40-3A53-4A3D-924A-D38F1059C7D5}" type="datetime1">
               <a:rPr lang="en-US" smtClean="0"/>
               <a:pPr/>
-              <a:t>3/9/2026</a:t>
+              <a:t>3/16/2026</a:t>
             </a:fld>
             <a:endParaRPr lang="en-US"/>
           </a:p>
@@ -4023,10 +4023,10 @@
       </p:sp>
       <p:pic>
         <p:nvPicPr>
-          <p:cNvPr id="7" name="Picture 6">
-            <a:extLst>
-              <a:ext uri="{FF2B5EF4-FFF2-40B4-BE49-F238E27FC236}">
-                <a16:creationId xmlns:a16="http://schemas.microsoft.com/office/drawing/2014/main" id="{13BA54D1-F4B4-522F-C739-0E316D6C3EE8}"/>
+          <p:cNvPr id="5" name="Picture 4">
+            <a:extLst>
+              <a:ext uri="{FF2B5EF4-FFF2-40B4-BE49-F238E27FC236}">
+                <a16:creationId xmlns:a16="http://schemas.microsoft.com/office/drawing/2014/main" id="{A262E328-9296-60E1-12B7-CBBD8D89ECB7}"/>
               </a:ext>
             </a:extLst>
           </p:cNvPr>
@@ -4043,8 +4043,8 @@
         </p:blipFill>
         <p:spPr>
           <a:xfrm>
-            <a:off x="805503" y="1171422"/>
-            <a:ext cx="7532994" cy="3732695"/>
+            <a:off x="440703" y="1288954"/>
+            <a:ext cx="7911747" cy="3764842"/>
           </a:xfrm>
           <a:prstGeom prst="rect">
             <a:avLst/>
@@ -4298,10 +4298,10 @@
       </p:sp>
       <p:pic>
         <p:nvPicPr>
-          <p:cNvPr id="7" name="Picture 6">
-            <a:extLst>
-              <a:ext uri="{FF2B5EF4-FFF2-40B4-BE49-F238E27FC236}">
-                <a16:creationId xmlns:a16="http://schemas.microsoft.com/office/drawing/2014/main" id="{2BA7FF40-6519-54FB-9CC9-E82597395127}"/>
+          <p:cNvPr id="5" name="Picture 4">
+            <a:extLst>
+              <a:ext uri="{FF2B5EF4-FFF2-40B4-BE49-F238E27FC236}">
+                <a16:creationId xmlns:a16="http://schemas.microsoft.com/office/drawing/2014/main" id="{05DA6351-BAAD-9704-302B-DB030AFBC124}"/>
               </a:ext>
             </a:extLst>
           </p:cNvPr>
@@ -4318,8 +4318,8 @@
         </p:blipFill>
         <p:spPr>
           <a:xfrm>
-            <a:off x="1423625" y="841247"/>
-            <a:ext cx="5943600" cy="4736465"/>
+            <a:off x="1505310" y="925913"/>
+            <a:ext cx="5943600" cy="4594225"/>
           </a:xfrm>
           <a:prstGeom prst="rect">
             <a:avLst/>
@@ -4581,10 +4581,10 @@
       </p:sp>
       <p:pic>
         <p:nvPicPr>
-          <p:cNvPr id="7" name="Picture 6">
-            <a:extLst>
-              <a:ext uri="{FF2B5EF4-FFF2-40B4-BE49-F238E27FC236}">
-                <a16:creationId xmlns:a16="http://schemas.microsoft.com/office/drawing/2014/main" id="{5DC5AF14-40B8-8946-5B4A-C76E81D40B84}"/>
+          <p:cNvPr id="5" name="Picture 4">
+            <a:extLst>
+              <a:ext uri="{FF2B5EF4-FFF2-40B4-BE49-F238E27FC236}">
+                <a16:creationId xmlns:a16="http://schemas.microsoft.com/office/drawing/2014/main" id="{D7E6FC95-5753-2378-4E2A-32C46576F38C}"/>
               </a:ext>
             </a:extLst>
           </p:cNvPr>
@@ -4601,7 +4601,7 @@
         </p:blipFill>
         <p:spPr>
           <a:xfrm>
-            <a:off x="1538334" y="791842"/>
+            <a:off x="1807234" y="743066"/>
             <a:ext cx="5943600" cy="5003165"/>
           </a:xfrm>
           <a:prstGeom prst="rect">
@@ -4774,7 +4774,7 @@
         <p:spPr>
           <a:xfrm>
             <a:off x="2295810" y="5745602"/>
-            <a:ext cx="4595489" cy="369332"/>
+            <a:ext cx="3874522" cy="369332"/>
           </a:xfrm>
           <a:prstGeom prst="rect">
             <a:avLst/>
@@ -4837,23 +4837,15 @@
             </a:r>
             <a:r>
               <a:rPr lang="en-US" dirty="0" err="1"/>
-              <a:t>ngân</a:t>
-            </a:r>
-            <a:r>
-              <a:rPr lang="en-US" dirty="0"/>
-              <a:t> </a:t>
-            </a:r>
-            <a:r>
-              <a:rPr lang="en-US" dirty="0" err="1"/>
-              <a:t>hàng</a:t>
-            </a:r>
-            <a:r>
-              <a:rPr lang="en-US" dirty="0"/>
-              <a:t> </a:t>
-            </a:r>
-            <a:r>
-              <a:rPr lang="en-US" dirty="0" err="1"/>
               <a:t>đề</a:t>
+            </a:r>
+            <a:r>
+              <a:rPr lang="en-US" dirty="0"/>
+              <a:t> </a:t>
+            </a:r>
+            <a:r>
+              <a:rPr lang="en-US" dirty="0" err="1"/>
+              <a:t>thi</a:t>
             </a:r>
             <a:r>
               <a:rPr lang="en-US" dirty="0"/>
@@ -4864,10 +4856,10 @@
       </p:sp>
       <p:pic>
         <p:nvPicPr>
-          <p:cNvPr id="5" name="Picture 4">
-            <a:extLst>
-              <a:ext uri="{FF2B5EF4-FFF2-40B4-BE49-F238E27FC236}">
-                <a16:creationId xmlns:a16="http://schemas.microsoft.com/office/drawing/2014/main" id="{46DE2F23-AADC-27D4-1A77-E9359ED50F9A}"/>
+          <p:cNvPr id="7" name="Picture 6">
+            <a:extLst>
+              <a:ext uri="{FF2B5EF4-FFF2-40B4-BE49-F238E27FC236}">
+                <a16:creationId xmlns:a16="http://schemas.microsoft.com/office/drawing/2014/main" id="{54081C67-39D6-C549-046D-5EA3830655B3}"/>
               </a:ext>
             </a:extLst>
           </p:cNvPr>
@@ -4884,8 +4876,8 @@
         </p:blipFill>
         <p:spPr>
           <a:xfrm>
-            <a:off x="1141976" y="841247"/>
-            <a:ext cx="6860047" cy="4758058"/>
+            <a:off x="1600200" y="1104553"/>
+            <a:ext cx="5943600" cy="4131310"/>
           </a:xfrm>
           <a:prstGeom prst="rect">
             <a:avLst/>
@@ -5155,10 +5147,10 @@
       </p:sp>
       <p:pic>
         <p:nvPicPr>
-          <p:cNvPr id="7" name="Picture 6">
-            <a:extLst>
-              <a:ext uri="{FF2B5EF4-FFF2-40B4-BE49-F238E27FC236}">
-                <a16:creationId xmlns:a16="http://schemas.microsoft.com/office/drawing/2014/main" id="{B1ACACBB-D7E0-1B97-D060-DEB8134D4094}"/>
+          <p:cNvPr id="5" name="Picture 4">
+            <a:extLst>
+              <a:ext uri="{FF2B5EF4-FFF2-40B4-BE49-F238E27FC236}">
+                <a16:creationId xmlns:a16="http://schemas.microsoft.com/office/drawing/2014/main" id="{997A5A71-0784-EDB8-B56C-B25BB87766B8}"/>
               </a:ext>
             </a:extLst>
           </p:cNvPr>
@@ -5175,8 +5167,8 @@
         </p:blipFill>
         <p:spPr>
           <a:xfrm>
-            <a:off x="686160" y="952358"/>
-            <a:ext cx="7771680" cy="4365758"/>
+            <a:off x="873178" y="1149038"/>
+            <a:ext cx="7397644" cy="4169078"/>
           </a:xfrm>
           <a:prstGeom prst="rect">
             <a:avLst/>
@@ -5997,10 +5989,10 @@
       </p:sp>
       <p:pic>
         <p:nvPicPr>
-          <p:cNvPr id="8" name="Picture 7">
-            <a:extLst>
-              <a:ext uri="{FF2B5EF4-FFF2-40B4-BE49-F238E27FC236}">
-                <a16:creationId xmlns:a16="http://schemas.microsoft.com/office/drawing/2014/main" id="{ABF733C9-EADF-0C54-BF1D-360306190662}"/>
+          <p:cNvPr id="4" name="Picture 3">
+            <a:extLst>
+              <a:ext uri="{FF2B5EF4-FFF2-40B4-BE49-F238E27FC236}">
+                <a16:creationId xmlns:a16="http://schemas.microsoft.com/office/drawing/2014/main" id="{C49A89F4-A6AA-8326-49C0-6E1446D70C46}"/>
               </a:ext>
             </a:extLst>
           </p:cNvPr>
@@ -6024,8 +6016,8 @@
         </p:blipFill>
         <p:spPr bwMode="auto">
           <a:xfrm>
-            <a:off x="69012" y="957838"/>
-            <a:ext cx="8948710" cy="4230560"/>
+            <a:off x="349369" y="1089246"/>
+            <a:ext cx="8673846" cy="4411985"/>
           </a:xfrm>
           <a:prstGeom prst="rect">
             <a:avLst/>
@@ -6279,10 +6271,10 @@
       </p:sp>
       <p:pic>
         <p:nvPicPr>
-          <p:cNvPr id="8" name="Picture 7">
-            <a:extLst>
-              <a:ext uri="{FF2B5EF4-FFF2-40B4-BE49-F238E27FC236}">
-                <a16:creationId xmlns:a16="http://schemas.microsoft.com/office/drawing/2014/main" id="{FB723A49-2937-278E-95FD-6191154B5FBB}"/>
+          <p:cNvPr id="4" name="Picture 3">
+            <a:extLst>
+              <a:ext uri="{FF2B5EF4-FFF2-40B4-BE49-F238E27FC236}">
+                <a16:creationId xmlns:a16="http://schemas.microsoft.com/office/drawing/2014/main" id="{ECA69D09-260F-2933-CE01-0FB4FC6873A4}"/>
               </a:ext>
             </a:extLst>
           </p:cNvPr>
@@ -6306,8 +6298,8 @@
         </p:blipFill>
         <p:spPr bwMode="auto">
           <a:xfrm>
-            <a:off x="234823" y="907168"/>
-            <a:ext cx="8905864" cy="4743134"/>
+            <a:off x="150962" y="977163"/>
+            <a:ext cx="8753154" cy="4630007"/>
           </a:xfrm>
           <a:prstGeom prst="rect">
             <a:avLst/>
@@ -7234,10 +7226,10 @@
       </p:sp>
       <p:pic>
         <p:nvPicPr>
-          <p:cNvPr id="8" name="Picture 7">
-            <a:extLst>
-              <a:ext uri="{FF2B5EF4-FFF2-40B4-BE49-F238E27FC236}">
-                <a16:creationId xmlns:a16="http://schemas.microsoft.com/office/drawing/2014/main" id="{D64D6135-BC70-8327-141D-2F48D073AC8C}"/>
+          <p:cNvPr id="4" name="Picture 3">
+            <a:extLst>
+              <a:ext uri="{FF2B5EF4-FFF2-40B4-BE49-F238E27FC236}">
+                <a16:creationId xmlns:a16="http://schemas.microsoft.com/office/drawing/2014/main" id="{1F64D8BF-B32C-5EBE-21EC-DFEE52899046}"/>
               </a:ext>
             </a:extLst>
           </p:cNvPr>
@@ -7261,8 +7253,8 @@
         </p:blipFill>
         <p:spPr bwMode="auto">
           <a:xfrm>
-            <a:off x="1717342" y="586685"/>
-            <a:ext cx="5434713" cy="5430068"/>
+            <a:off x="1988388" y="677257"/>
+            <a:ext cx="5344064" cy="5339496"/>
           </a:xfrm>
           <a:prstGeom prst="rect">
             <a:avLst/>
@@ -8638,12 +8630,80 @@
           </a:p>
         </p:txBody>
       </p:sp>
+      <p:sp>
+        <p:nvSpPr>
+          <p:cNvPr id="6" name="TextBox 5">
+            <a:extLst>
+              <a:ext uri="{FF2B5EF4-FFF2-40B4-BE49-F238E27FC236}">
+                <a16:creationId xmlns:a16="http://schemas.microsoft.com/office/drawing/2014/main" id="{D66D9641-79ED-88EB-D3E2-DE8F086C53B0}"/>
+              </a:ext>
+            </a:extLst>
+          </p:cNvPr>
+          <p:cNvSpPr txBox="1"/>
+          <p:nvPr/>
+        </p:nvSpPr>
+        <p:spPr>
+          <a:xfrm>
+            <a:off x="2984740" y="6043803"/>
+            <a:ext cx="2714718" cy="369332"/>
+          </a:xfrm>
+          <a:prstGeom prst="rect">
+            <a:avLst/>
+          </a:prstGeom>
+          <a:noFill/>
+        </p:spPr>
+        <p:txBody>
+          <a:bodyPr wrap="none" rtlCol="0">
+            <a:spAutoFit/>
+          </a:bodyPr>
+          <a:lstStyle/>
+          <a:p>
+            <a:r>
+              <a:rPr lang="en-US" dirty="0" err="1"/>
+              <a:t>Biểu</a:t>
+            </a:r>
+            <a:r>
+              <a:rPr lang="en-US" dirty="0"/>
+              <a:t> </a:t>
+            </a:r>
+            <a:r>
+              <a:rPr lang="en-US" dirty="0" err="1"/>
+              <a:t>đồ</a:t>
+            </a:r>
+            <a:r>
+              <a:rPr lang="en-US" dirty="0"/>
+              <a:t> </a:t>
+            </a:r>
+            <a:r>
+              <a:rPr lang="en-US" dirty="0" err="1"/>
+              <a:t>Usecase</a:t>
+            </a:r>
+            <a:r>
+              <a:rPr lang="en-US" dirty="0"/>
+              <a:t> </a:t>
+            </a:r>
+            <a:r>
+              <a:rPr lang="en-US" dirty="0" err="1"/>
+              <a:t>tổng</a:t>
+            </a:r>
+            <a:r>
+              <a:rPr lang="en-US" dirty="0"/>
+              <a:t> </a:t>
+            </a:r>
+            <a:r>
+              <a:rPr lang="en-US" dirty="0" err="1"/>
+              <a:t>quan</a:t>
+            </a:r>
+            <a:endParaRPr lang="en-US" dirty="0"/>
+          </a:p>
+        </p:txBody>
+      </p:sp>
       <p:pic>
         <p:nvPicPr>
-          <p:cNvPr id="5" name="Picture 4">
-            <a:extLst>
-              <a:ext uri="{FF2B5EF4-FFF2-40B4-BE49-F238E27FC236}">
-                <a16:creationId xmlns:a16="http://schemas.microsoft.com/office/drawing/2014/main" id="{13DF2967-0284-B8FB-129D-95888BF7069E}"/>
+          <p:cNvPr id="7" name="Picture 6">
+            <a:extLst>
+              <a:ext uri="{FF2B5EF4-FFF2-40B4-BE49-F238E27FC236}">
+                <a16:creationId xmlns:a16="http://schemas.microsoft.com/office/drawing/2014/main" id="{38C79DB8-0CA3-1F20-CEDD-7A5A546FCB3C}"/>
               </a:ext>
             </a:extLst>
           </p:cNvPr>
@@ -8660,82 +8720,14 @@
         </p:blipFill>
         <p:spPr>
           <a:xfrm>
-            <a:off x="2264435" y="1278188"/>
-            <a:ext cx="4300268" cy="4738565"/>
+            <a:off x="2191965" y="1288241"/>
+            <a:ext cx="4300267" cy="4755562"/>
           </a:xfrm>
           <a:prstGeom prst="rect">
             <a:avLst/>
           </a:prstGeom>
         </p:spPr>
       </p:pic>
-      <p:sp>
-        <p:nvSpPr>
-          <p:cNvPr id="6" name="TextBox 5">
-            <a:extLst>
-              <a:ext uri="{FF2B5EF4-FFF2-40B4-BE49-F238E27FC236}">
-                <a16:creationId xmlns:a16="http://schemas.microsoft.com/office/drawing/2014/main" id="{D66D9641-79ED-88EB-D3E2-DE8F086C53B0}"/>
-              </a:ext>
-            </a:extLst>
-          </p:cNvPr>
-          <p:cNvSpPr txBox="1"/>
-          <p:nvPr/>
-        </p:nvSpPr>
-        <p:spPr>
-          <a:xfrm>
-            <a:off x="2984740" y="6043803"/>
-            <a:ext cx="2714718" cy="369332"/>
-          </a:xfrm>
-          <a:prstGeom prst="rect">
-            <a:avLst/>
-          </a:prstGeom>
-          <a:noFill/>
-        </p:spPr>
-        <p:txBody>
-          <a:bodyPr wrap="none" rtlCol="0">
-            <a:spAutoFit/>
-          </a:bodyPr>
-          <a:lstStyle/>
-          <a:p>
-            <a:r>
-              <a:rPr lang="en-US" dirty="0" err="1"/>
-              <a:t>Biểu</a:t>
-            </a:r>
-            <a:r>
-              <a:rPr lang="en-US" dirty="0"/>
-              <a:t> </a:t>
-            </a:r>
-            <a:r>
-              <a:rPr lang="en-US" dirty="0" err="1"/>
-              <a:t>đồ</a:t>
-            </a:r>
-            <a:r>
-              <a:rPr lang="en-US" dirty="0"/>
-              <a:t> </a:t>
-            </a:r>
-            <a:r>
-              <a:rPr lang="en-US" dirty="0" err="1"/>
-              <a:t>Usecase</a:t>
-            </a:r>
-            <a:r>
-              <a:rPr lang="en-US" dirty="0"/>
-              <a:t> </a:t>
-            </a:r>
-            <a:r>
-              <a:rPr lang="en-US" dirty="0" err="1"/>
-              <a:t>tổng</a:t>
-            </a:r>
-            <a:r>
-              <a:rPr lang="en-US" dirty="0"/>
-              <a:t> </a:t>
-            </a:r>
-            <a:r>
-              <a:rPr lang="en-US" dirty="0" err="1"/>
-              <a:t>quan</a:t>
-            </a:r>
-            <a:endParaRPr lang="en-US" dirty="0"/>
-          </a:p>
-        </p:txBody>
-      </p:sp>
     </p:spTree>
     <p:extLst>
       <p:ext uri="{BB962C8B-B14F-4D97-AF65-F5344CB8AC3E}">
@@ -8983,10 +8975,10 @@
       </p:sp>
       <p:pic>
         <p:nvPicPr>
-          <p:cNvPr id="5" name="Picture 4">
-            <a:extLst>
-              <a:ext uri="{FF2B5EF4-FFF2-40B4-BE49-F238E27FC236}">
-                <a16:creationId xmlns:a16="http://schemas.microsoft.com/office/drawing/2014/main" id="{DF3E7D63-9FB8-5285-0632-30F134660FAF}"/>
+          <p:cNvPr id="7" name="Picture 6">
+            <a:extLst>
+              <a:ext uri="{FF2B5EF4-FFF2-40B4-BE49-F238E27FC236}">
+                <a16:creationId xmlns:a16="http://schemas.microsoft.com/office/drawing/2014/main" id="{38F7A048-E276-DFA1-9D71-45C993394A15}"/>
               </a:ext>
             </a:extLst>
           </p:cNvPr>
@@ -9003,8 +8995,8 @@
         </p:blipFill>
         <p:spPr>
           <a:xfrm>
-            <a:off x="1179929" y="957838"/>
-            <a:ext cx="6413740" cy="4399168"/>
+            <a:off x="909890" y="1036430"/>
+            <a:ext cx="7324220" cy="4017366"/>
           </a:xfrm>
           <a:prstGeom prst="rect">
             <a:avLst/>
@@ -9266,10 +9258,10 @@
       </p:sp>
       <p:pic>
         <p:nvPicPr>
-          <p:cNvPr id="7" name="Picture 6">
-            <a:extLst>
-              <a:ext uri="{FF2B5EF4-FFF2-40B4-BE49-F238E27FC236}">
-                <a16:creationId xmlns:a16="http://schemas.microsoft.com/office/drawing/2014/main" id="{447504FC-B8D7-F3CA-9325-93A3DF1654A1}"/>
+          <p:cNvPr id="5" name="Picture 4">
+            <a:extLst>
+              <a:ext uri="{FF2B5EF4-FFF2-40B4-BE49-F238E27FC236}">
+                <a16:creationId xmlns:a16="http://schemas.microsoft.com/office/drawing/2014/main" id="{12C59E01-D91F-B6D8-94A1-AD4B228A0392}"/>
               </a:ext>
             </a:extLst>
           </p:cNvPr>
@@ -9286,8 +9278,8 @@
         </p:blipFill>
         <p:spPr>
           <a:xfrm>
-            <a:off x="1414999" y="930486"/>
-            <a:ext cx="5943600" cy="4434205"/>
+            <a:off x="1156645" y="1123977"/>
+            <a:ext cx="6830709" cy="4007203"/>
           </a:xfrm>
           <a:prstGeom prst="rect">
             <a:avLst/>
@@ -9557,10 +9549,10 @@
       </p:sp>
       <p:pic>
         <p:nvPicPr>
-          <p:cNvPr id="7" name="Picture 6">
-            <a:extLst>
-              <a:ext uri="{FF2B5EF4-FFF2-40B4-BE49-F238E27FC236}">
-                <a16:creationId xmlns:a16="http://schemas.microsoft.com/office/drawing/2014/main" id="{550DF4FA-6C76-9317-06D8-A12C4B36E327}"/>
+          <p:cNvPr id="5" name="Picture 4">
+            <a:extLst>
+              <a:ext uri="{FF2B5EF4-FFF2-40B4-BE49-F238E27FC236}">
+                <a16:creationId xmlns:a16="http://schemas.microsoft.com/office/drawing/2014/main" id="{142D8A0F-76E9-50E9-D38C-CC5007A3054F}"/>
               </a:ext>
             </a:extLst>
           </p:cNvPr>
@@ -9577,8 +9569,8 @@
         </p:blipFill>
         <p:spPr>
           <a:xfrm>
-            <a:off x="1272396" y="957838"/>
-            <a:ext cx="6698412" cy="4308882"/>
+            <a:off x="1088767" y="1063696"/>
+            <a:ext cx="7054523" cy="4087252"/>
           </a:xfrm>
           <a:prstGeom prst="rect">
             <a:avLst/>
@@ -9840,10 +9832,10 @@
       </p:sp>
       <p:pic>
         <p:nvPicPr>
-          <p:cNvPr id="7" name="Picture 6">
-            <a:extLst>
-              <a:ext uri="{FF2B5EF4-FFF2-40B4-BE49-F238E27FC236}">
-                <a16:creationId xmlns:a16="http://schemas.microsoft.com/office/drawing/2014/main" id="{BB100F95-A4F6-49D8-31BE-888A10F3AB27}"/>
+          <p:cNvPr id="5" name="Picture 4">
+            <a:extLst>
+              <a:ext uri="{FF2B5EF4-FFF2-40B4-BE49-F238E27FC236}">
+                <a16:creationId xmlns:a16="http://schemas.microsoft.com/office/drawing/2014/main" id="{33B198FC-76B7-B83E-BDD6-8167568F3A38}"/>
               </a:ext>
             </a:extLst>
           </p:cNvPr>
@@ -9860,8 +9852,8 @@
         </p:blipFill>
         <p:spPr>
           <a:xfrm>
-            <a:off x="625414" y="1081252"/>
-            <a:ext cx="8065729" cy="3972544"/>
+            <a:off x="444134" y="1270110"/>
+            <a:ext cx="8083204" cy="3392182"/>
           </a:xfrm>
           <a:prstGeom prst="rect">
             <a:avLst/>
@@ -10115,10 +10107,10 @@
       </p:sp>
       <p:pic>
         <p:nvPicPr>
-          <p:cNvPr id="7" name="Picture 6">
-            <a:extLst>
-              <a:ext uri="{FF2B5EF4-FFF2-40B4-BE49-F238E27FC236}">
-                <a16:creationId xmlns:a16="http://schemas.microsoft.com/office/drawing/2014/main" id="{2231520C-0AA0-E0CF-9979-A3BEA515B7C9}"/>
+          <p:cNvPr id="5" name="Picture 4">
+            <a:extLst>
+              <a:ext uri="{FF2B5EF4-FFF2-40B4-BE49-F238E27FC236}">
+                <a16:creationId xmlns:a16="http://schemas.microsoft.com/office/drawing/2014/main" id="{AAAFEDED-B46F-1435-BCAE-E2920D925917}"/>
               </a:ext>
             </a:extLst>
           </p:cNvPr>
@@ -10135,8 +10127,8 @@
         </p:blipFill>
         <p:spPr>
           <a:xfrm>
-            <a:off x="1120655" y="841247"/>
-            <a:ext cx="6461964" cy="4363720"/>
+            <a:off x="1448459" y="891264"/>
+            <a:ext cx="5943600" cy="4423410"/>
           </a:xfrm>
           <a:prstGeom prst="rect">
             <a:avLst/>
